--- a/figure-panels/Figure5/Figure5-withstructures.pptx
+++ b/figure-panels/Figure5/Figure5-withstructures.pptx
@@ -104,6 +104,11 @@
       </a:defRPr>
     </a:lvl9pPr>
   </p:defaultTextStyle>
+  <p:extLst>
+    <p:ext uri="{EFAFB233-063F-42B5-8137-9DF3F51BA10A}">
+      <p15:sldGuideLst xmlns:p15="http://schemas.microsoft.com/office/powerpoint/2012/main"/>
+    </p:ext>
+  </p:extLst>
 </p:presentation>
 </file>
 
@@ -2970,36 +2975,6 @@
       </p:grpSpPr>
       <p:pic>
         <p:nvPicPr>
-          <p:cNvPr id="5" name="Picture 4" descr="A graph of different colored lines&#10;&#10;Description automatically generated with medium confidence">
-            <a:extLst>
-              <a:ext uri="{FF2B5EF4-FFF2-40B4-BE49-F238E27FC236}">
-                <a16:creationId xmlns:a16="http://schemas.microsoft.com/office/drawing/2014/main" id="{10B057A8-BEC6-3D12-B45C-15E570197357}"/>
-              </a:ext>
-            </a:extLst>
-          </p:cNvPr>
-          <p:cNvPicPr>
-            <a:picLocks noChangeAspect="1"/>
-          </p:cNvPicPr>
-          <p:nvPr/>
-        </p:nvPicPr>
-        <p:blipFill>
-          <a:blip r:embed="rId2"/>
-          <a:stretch>
-            <a:fillRect/>
-          </a:stretch>
-        </p:blipFill>
-        <p:spPr>
-          <a:xfrm>
-            <a:off x="0" y="-2216"/>
-            <a:ext cx="9144000" cy="3177813"/>
-          </a:xfrm>
-          <a:prstGeom prst="rect">
-            <a:avLst/>
-          </a:prstGeom>
-        </p:spPr>
-      </p:pic>
-      <p:pic>
-        <p:nvPicPr>
           <p:cNvPr id="7" name="Picture 6" descr="A close-up of a white structure&#10;&#10;Description automatically generated">
             <a:extLst>
               <a:ext uri="{FF2B5EF4-FFF2-40B4-BE49-F238E27FC236}">
@@ -3013,7 +2988,7 @@
           <p:nvPr/>
         </p:nvPicPr>
         <p:blipFill>
-          <a:blip r:embed="rId3"/>
+          <a:blip r:embed="rId2"/>
           <a:srcRect l="7562" r="22155" b="7574"/>
           <a:stretch/>
         </p:blipFill>
@@ -3049,7 +3024,7 @@
           <p:nvPr/>
         </p:nvPicPr>
         <p:blipFill>
-          <a:blip r:embed="rId4"/>
+          <a:blip r:embed="rId3"/>
           <a:srcRect l="4091" t="-139" r="25320" b="12777"/>
           <a:stretch/>
         </p:blipFill>
@@ -3085,7 +3060,7 @@
           <p:nvPr/>
         </p:nvPicPr>
         <p:blipFill>
-          <a:blip r:embed="rId5"/>
+          <a:blip r:embed="rId4"/>
           <a:srcRect l="12676" t="-1" r="15819" b="15573"/>
           <a:stretch/>
         </p:blipFill>
@@ -3121,7 +3096,7 @@
           <p:nvPr/>
         </p:nvPicPr>
         <p:blipFill>
-          <a:blip r:embed="rId6"/>
+          <a:blip r:embed="rId5"/>
           <a:srcRect l="2656" r="15335" b="12127"/>
           <a:stretch/>
         </p:blipFill>
@@ -3414,6 +3389,36 @@
           </a:p>
         </p:txBody>
       </p:sp>
+      <p:pic>
+        <p:nvPicPr>
+          <p:cNvPr id="3" name="Picture 2" descr="A graph of different colored lines&#10;&#10;Description automatically generated with medium confidence">
+            <a:extLst>
+              <a:ext uri="{FF2B5EF4-FFF2-40B4-BE49-F238E27FC236}">
+                <a16:creationId xmlns:a16="http://schemas.microsoft.com/office/drawing/2014/main" id="{6A62F839-4629-D244-B502-24E18E452503}"/>
+              </a:ext>
+            </a:extLst>
+          </p:cNvPr>
+          <p:cNvPicPr>
+            <a:picLocks noChangeAspect="1"/>
+          </p:cNvPicPr>
+          <p:nvPr/>
+        </p:nvPicPr>
+        <p:blipFill>
+          <a:blip r:embed="rId6"/>
+          <a:stretch>
+            <a:fillRect/>
+          </a:stretch>
+        </p:blipFill>
+        <p:spPr>
+          <a:xfrm>
+            <a:off x="0" y="-1"/>
+            <a:ext cx="9144000" cy="3177813"/>
+          </a:xfrm>
+          <a:prstGeom prst="rect">
+            <a:avLst/>
+          </a:prstGeom>
+        </p:spPr>
+      </p:pic>
     </p:spTree>
     <p:extLst>
       <p:ext uri="{BB962C8B-B14F-4D97-AF65-F5344CB8AC3E}">

--- a/figure-panels/Figure5/Figure5-withstructures.pptx
+++ b/figure-panels/Figure5/Figure5-withstructures.pptx
@@ -243,7 +243,7 @@
           <a:p>
             <a:fld id="{46475AFC-B791-2447-8E6C-06084F354585}" type="datetimeFigureOut">
               <a:rPr lang="en-US" smtClean="0"/>
-              <a:t>9/4/25</a:t>
+              <a:t>9/5/25</a:t>
             </a:fld>
             <a:endParaRPr lang="en-US"/>
           </a:p>
@@ -413,7 +413,7 @@
           <a:p>
             <a:fld id="{46475AFC-B791-2447-8E6C-06084F354585}" type="datetimeFigureOut">
               <a:rPr lang="en-US" smtClean="0"/>
-              <a:t>9/4/25</a:t>
+              <a:t>9/5/25</a:t>
             </a:fld>
             <a:endParaRPr lang="en-US"/>
           </a:p>
@@ -593,7 +593,7 @@
           <a:p>
             <a:fld id="{46475AFC-B791-2447-8E6C-06084F354585}" type="datetimeFigureOut">
               <a:rPr lang="en-US" smtClean="0"/>
-              <a:t>9/4/25</a:t>
+              <a:t>9/5/25</a:t>
             </a:fld>
             <a:endParaRPr lang="en-US"/>
           </a:p>
@@ -763,7 +763,7 @@
           <a:p>
             <a:fld id="{46475AFC-B791-2447-8E6C-06084F354585}" type="datetimeFigureOut">
               <a:rPr lang="en-US" smtClean="0"/>
-              <a:t>9/4/25</a:t>
+              <a:t>9/5/25</a:t>
             </a:fld>
             <a:endParaRPr lang="en-US"/>
           </a:p>
@@ -1009,7 +1009,7 @@
           <a:p>
             <a:fld id="{46475AFC-B791-2447-8E6C-06084F354585}" type="datetimeFigureOut">
               <a:rPr lang="en-US" smtClean="0"/>
-              <a:t>9/4/25</a:t>
+              <a:t>9/5/25</a:t>
             </a:fld>
             <a:endParaRPr lang="en-US"/>
           </a:p>
@@ -1241,7 +1241,7 @@
           <a:p>
             <a:fld id="{46475AFC-B791-2447-8E6C-06084F354585}" type="datetimeFigureOut">
               <a:rPr lang="en-US" smtClean="0"/>
-              <a:t>9/4/25</a:t>
+              <a:t>9/5/25</a:t>
             </a:fld>
             <a:endParaRPr lang="en-US"/>
           </a:p>
@@ -1608,7 +1608,7 @@
           <a:p>
             <a:fld id="{46475AFC-B791-2447-8E6C-06084F354585}" type="datetimeFigureOut">
               <a:rPr lang="en-US" smtClean="0"/>
-              <a:t>9/4/25</a:t>
+              <a:t>9/5/25</a:t>
             </a:fld>
             <a:endParaRPr lang="en-US"/>
           </a:p>
@@ -1726,7 +1726,7 @@
           <a:p>
             <a:fld id="{46475AFC-B791-2447-8E6C-06084F354585}" type="datetimeFigureOut">
               <a:rPr lang="en-US" smtClean="0"/>
-              <a:t>9/4/25</a:t>
+              <a:t>9/5/25</a:t>
             </a:fld>
             <a:endParaRPr lang="en-US"/>
           </a:p>
@@ -1821,7 +1821,7 @@
           <a:p>
             <a:fld id="{46475AFC-B791-2447-8E6C-06084F354585}" type="datetimeFigureOut">
               <a:rPr lang="en-US" smtClean="0"/>
-              <a:t>9/4/25</a:t>
+              <a:t>9/5/25</a:t>
             </a:fld>
             <a:endParaRPr lang="en-US"/>
           </a:p>
@@ -2098,7 +2098,7 @@
           <a:p>
             <a:fld id="{46475AFC-B791-2447-8E6C-06084F354585}" type="datetimeFigureOut">
               <a:rPr lang="en-US" smtClean="0"/>
-              <a:t>9/4/25</a:t>
+              <a:t>9/5/25</a:t>
             </a:fld>
             <a:endParaRPr lang="en-US"/>
           </a:p>
@@ -2355,7 +2355,7 @@
           <a:p>
             <a:fld id="{46475AFC-B791-2447-8E6C-06084F354585}" type="datetimeFigureOut">
               <a:rPr lang="en-US" smtClean="0"/>
-              <a:t>9/4/25</a:t>
+              <a:t>9/5/25</a:t>
             </a:fld>
             <a:endParaRPr lang="en-US"/>
           </a:p>
@@ -2568,7 +2568,7 @@
           <a:p>
             <a:fld id="{46475AFC-B791-2447-8E6C-06084F354585}" type="datetimeFigureOut">
               <a:rPr lang="en-US" smtClean="0"/>
-              <a:t>9/4/25</a:t>
+              <a:t>9/5/25</a:t>
             </a:fld>
             <a:endParaRPr lang="en-US"/>
           </a:p>
@@ -3391,7 +3391,7 @@
       </p:sp>
       <p:pic>
         <p:nvPicPr>
-          <p:cNvPr id="3" name="Picture 2" descr="A graph of different colored lines&#10;&#10;Description automatically generated with medium confidence">
+          <p:cNvPr id="3" name="Picture 2">
             <a:extLst>
               <a:ext uri="{FF2B5EF4-FFF2-40B4-BE49-F238E27FC236}">
                 <a16:creationId xmlns:a16="http://schemas.microsoft.com/office/drawing/2014/main" id="{6A62F839-4629-D244-B502-24E18E452503}"/>
@@ -3405,14 +3405,13 @@
         </p:nvPicPr>
         <p:blipFill>
           <a:blip r:embed="rId6"/>
-          <a:stretch>
-            <a:fillRect/>
-          </a:stretch>
+          <a:srcRect/>
+          <a:stretch/>
         </p:blipFill>
         <p:spPr>
           <a:xfrm>
             <a:off x="0" y="-1"/>
-            <a:ext cx="9144000" cy="3177813"/>
+            <a:ext cx="9144000" cy="3177812"/>
           </a:xfrm>
           <a:prstGeom prst="rect">
             <a:avLst/>
